--- a/Driver_Fatigue_Detection_FINAL.pptx
+++ b/Driver_Fatigue_Detection_FINAL.pptx
@@ -14030,8 +14030,8 @@
         </p:nvSpPr>
         <p:spPr>
           <a:xfrm>
-            <a:off x="1152144" y="1508760"/>
-            <a:ext cx="4669383" cy="1328928"/>
+            <a:off x="1152144" y="1840312"/>
+            <a:ext cx="4669383" cy="665823"/>
           </a:xfrm>
           <a:prstGeom prst="rect">
             <a:avLst/>
@@ -14050,13 +14050,31 @@
               </a:lnSpc>
             </a:pPr>
             <a:r>
-              <a:rPr sz="1350" b="1" i="0">
+              <a:rPr lang="en-IN" sz="1350" b="1" dirty="0">
                 <a:solidFill>
                   <a:srgbClr val="0A4237"/>
                 </a:solidFill>
                 <a:latin typeface="Segoe UI"/>
               </a:rPr>
-              <a:t>LBPH recognition is a lightweight heuristic</a:t>
+              <a:t>R</a:t>
+            </a:r>
+            <a:r>
+              <a:rPr sz="1350" b="1" i="0" dirty="0" err="1">
+                <a:solidFill>
+                  <a:srgbClr val="0A4237"/>
+                </a:solidFill>
+                <a:latin typeface="Segoe UI"/>
+              </a:rPr>
+              <a:t>ecognition</a:t>
+            </a:r>
+            <a:r>
+              <a:rPr sz="1350" b="1" i="0" dirty="0">
+                <a:solidFill>
+                  <a:srgbClr val="0A4237"/>
+                </a:solidFill>
+                <a:latin typeface="Segoe UI"/>
+              </a:rPr>
+              <a:t> is lightweight </a:t>
             </a:r>
           </a:p>
           <a:p>
@@ -14069,7 +14087,7 @@
               </a:spcBef>
             </a:pPr>
             <a:r>
-              <a:rPr sz="1050" b="0" i="0">
+              <a:rPr sz="1050" b="0" i="0" dirty="0">
                 <a:solidFill>
                   <a:srgbClr val="5B636E"/>
                 </a:solidFill>
